--- a/Lebayle_Kevin_7_présentation_13.04.26.pptx
+++ b/Lebayle_Kevin_7_présentation_13.04.26.pptx
@@ -16,23 +16,24 @@
     <p:sldId id="338" r:id="rId10"/>
     <p:sldId id="341" r:id="rId11"/>
     <p:sldId id="344" r:id="rId12"/>
-    <p:sldId id="353" r:id="rId13"/>
-    <p:sldId id="339" r:id="rId14"/>
-    <p:sldId id="340" r:id="rId15"/>
-    <p:sldId id="343" r:id="rId16"/>
-    <p:sldId id="349" r:id="rId17"/>
-    <p:sldId id="345" r:id="rId18"/>
-    <p:sldId id="354" r:id="rId19"/>
-    <p:sldId id="356" r:id="rId20"/>
-    <p:sldId id="351" r:id="rId21"/>
-    <p:sldId id="358" r:id="rId22"/>
-    <p:sldId id="350" r:id="rId23"/>
-    <p:sldId id="355" r:id="rId24"/>
-    <p:sldId id="357" r:id="rId25"/>
-    <p:sldId id="334" r:id="rId26"/>
-    <p:sldId id="332" r:id="rId27"/>
-    <p:sldId id="333" r:id="rId28"/>
-    <p:sldId id="302" r:id="rId29"/>
+    <p:sldId id="359" r:id="rId13"/>
+    <p:sldId id="353" r:id="rId14"/>
+    <p:sldId id="339" r:id="rId15"/>
+    <p:sldId id="340" r:id="rId16"/>
+    <p:sldId id="343" r:id="rId17"/>
+    <p:sldId id="349" r:id="rId18"/>
+    <p:sldId id="345" r:id="rId19"/>
+    <p:sldId id="354" r:id="rId20"/>
+    <p:sldId id="356" r:id="rId21"/>
+    <p:sldId id="351" r:id="rId22"/>
+    <p:sldId id="358" r:id="rId23"/>
+    <p:sldId id="350" r:id="rId24"/>
+    <p:sldId id="355" r:id="rId25"/>
+    <p:sldId id="357" r:id="rId26"/>
+    <p:sldId id="334" r:id="rId27"/>
+    <p:sldId id="332" r:id="rId28"/>
+    <p:sldId id="333" r:id="rId29"/>
+    <p:sldId id="302" r:id="rId30"/>
   </p:sldIdLst>
   <p:sldSz cx="12192000" cy="6858000"/>
   <p:notesSz cx="6858000" cy="9144000"/>
@@ -28163,7 +28164,7 @@
           <a:p>
             <a:fld id="{4AAD347D-5ACD-4C99-B74B-A9C85AD731AF}" type="datetimeFigureOut">
               <a:rPr lang="en-US" smtClean="0"/>
-              <a:t>4/16/2026</a:t>
+              <a:t>4/22/2026</a:t>
             </a:fld>
             <a:endParaRPr lang="en-US" dirty="0"/>
           </a:p>
@@ -28414,7 +28415,7 @@
           <a:p>
             <a:fld id="{4AAD347D-5ACD-4C99-B74B-A9C85AD731AF}" type="datetimeFigureOut">
               <a:rPr lang="en-US" smtClean="0"/>
-              <a:t>4/16/2026</a:t>
+              <a:t>4/22/2026</a:t>
             </a:fld>
             <a:endParaRPr lang="en-US" dirty="0"/>
           </a:p>
@@ -28729,7 +28730,7 @@
           <a:p>
             <a:fld id="{4AAD347D-5ACD-4C99-B74B-A9C85AD731AF}" type="datetimeFigureOut">
               <a:rPr lang="en-US" smtClean="0"/>
-              <a:t>4/16/2026</a:t>
+              <a:t>4/22/2026</a:t>
             </a:fld>
             <a:endParaRPr lang="en-US" dirty="0"/>
           </a:p>
@@ -29071,7 +29072,7 @@
           <a:p>
             <a:fld id="{4AAD347D-5ACD-4C99-B74B-A9C85AD731AF}" type="datetimeFigureOut">
               <a:rPr lang="en-US" smtClean="0"/>
-              <a:t>4/16/2026</a:t>
+              <a:t>4/22/2026</a:t>
             </a:fld>
             <a:endParaRPr lang="en-US" dirty="0"/>
           </a:p>
@@ -29386,7 +29387,7 @@
           <a:p>
             <a:fld id="{4AAD347D-5ACD-4C99-B74B-A9C85AD731AF}" type="datetimeFigureOut">
               <a:rPr lang="en-US" smtClean="0"/>
-              <a:t>4/16/2026</a:t>
+              <a:t>4/22/2026</a:t>
             </a:fld>
             <a:endParaRPr lang="en-US" dirty="0"/>
           </a:p>
@@ -29780,7 +29781,7 @@
           <a:p>
             <a:fld id="{4AAD347D-5ACD-4C99-B74B-A9C85AD731AF}" type="datetimeFigureOut">
               <a:rPr lang="en-US" smtClean="0"/>
-              <a:t>4/16/2026</a:t>
+              <a:t>4/22/2026</a:t>
             </a:fld>
             <a:endParaRPr lang="en-US" dirty="0"/>
           </a:p>
@@ -29951,7 +29952,7 @@
           <a:p>
             <a:fld id="{4509A250-FF31-4206-8172-F9D3106AACB1}" type="datetimeFigureOut">
               <a:rPr lang="en-US" smtClean="0"/>
-              <a:t>4/16/2026</a:t>
+              <a:t>4/22/2026</a:t>
             </a:fld>
             <a:endParaRPr lang="en-US" dirty="0"/>
           </a:p>
@@ -30131,7 +30132,7 @@
           <a:p>
             <a:fld id="{4509A250-FF31-4206-8172-F9D3106AACB1}" type="datetimeFigureOut">
               <a:rPr lang="en-US" smtClean="0"/>
-              <a:t>4/16/2026</a:t>
+              <a:t>4/22/2026</a:t>
             </a:fld>
             <a:endParaRPr lang="en-US" dirty="0"/>
           </a:p>
@@ -30307,7 +30308,7 @@
           <a:p>
             <a:fld id="{4509A250-FF31-4206-8172-F9D3106AACB1}" type="datetimeFigureOut">
               <a:rPr lang="en-US" smtClean="0"/>
-              <a:t>4/16/2026</a:t>
+              <a:t>4/22/2026</a:t>
             </a:fld>
             <a:endParaRPr lang="en-US" dirty="0"/>
           </a:p>
@@ -30554,7 +30555,7 @@
           <a:p>
             <a:fld id="{9796027F-7875-4030-9381-8BD8C4F21935}" type="datetimeFigureOut">
               <a:rPr lang="en-US" smtClean="0"/>
-              <a:t>4/16/2026</a:t>
+              <a:t>4/22/2026</a:t>
             </a:fld>
             <a:endParaRPr lang="en-US" dirty="0"/>
           </a:p>
@@ -30786,7 +30787,7 @@
           <a:p>
             <a:fld id="{9796027F-7875-4030-9381-8BD8C4F21935}" type="datetimeFigureOut">
               <a:rPr lang="en-US" smtClean="0"/>
-              <a:t>4/16/2026</a:t>
+              <a:t>4/22/2026</a:t>
             </a:fld>
             <a:endParaRPr lang="en-US" dirty="0"/>
           </a:p>
@@ -31160,7 +31161,7 @@
           <a:p>
             <a:fld id="{9796027F-7875-4030-9381-8BD8C4F21935}" type="datetimeFigureOut">
               <a:rPr lang="en-US" smtClean="0"/>
-              <a:t>4/16/2026</a:t>
+              <a:t>4/22/2026</a:t>
             </a:fld>
             <a:endParaRPr lang="en-US" dirty="0"/>
           </a:p>
@@ -31283,7 +31284,7 @@
           <a:p>
             <a:fld id="{4509A250-FF31-4206-8172-F9D3106AACB1}" type="datetimeFigureOut">
               <a:rPr lang="en-US" smtClean="0"/>
-              <a:t>4/16/2026</a:t>
+              <a:t>4/22/2026</a:t>
             </a:fld>
             <a:endParaRPr lang="en-US" dirty="0"/>
           </a:p>
@@ -31378,7 +31379,7 @@
           <a:p>
             <a:fld id="{4509A250-FF31-4206-8172-F9D3106AACB1}" type="datetimeFigureOut">
               <a:rPr lang="en-US" smtClean="0"/>
-              <a:t>4/16/2026</a:t>
+              <a:t>4/22/2026</a:t>
             </a:fld>
             <a:endParaRPr lang="en-US" dirty="0"/>
           </a:p>
@@ -31633,7 +31634,7 @@
           <a:p>
             <a:fld id="{4509A250-FF31-4206-8172-F9D3106AACB1}" type="datetimeFigureOut">
               <a:rPr lang="en-US" smtClean="0"/>
-              <a:t>4/16/2026</a:t>
+              <a:t>4/22/2026</a:t>
             </a:fld>
             <a:endParaRPr lang="en-US" dirty="0"/>
           </a:p>
@@ -31896,7 +31897,7 @@
           <a:p>
             <a:fld id="{4509A250-FF31-4206-8172-F9D3106AACB1}" type="datetimeFigureOut">
               <a:rPr lang="en-US" smtClean="0"/>
-              <a:t>4/16/2026</a:t>
+              <a:t>4/22/2026</a:t>
             </a:fld>
             <a:endParaRPr lang="en-US" dirty="0"/>
           </a:p>
@@ -32639,7 +32640,7 @@
           <a:p>
             <a:fld id="{4AAD347D-5ACD-4C99-B74B-A9C85AD731AF}" type="datetimeFigureOut">
               <a:rPr lang="en-US" smtClean="0"/>
-              <a:t>4/16/2026</a:t>
+              <a:t>4/22/2026</a:t>
             </a:fld>
             <a:endParaRPr lang="en-US" dirty="0"/>
           </a:p>
@@ -33272,7 +33273,7 @@
 </file>
 
 <file path=ppt/slides/slide10.xml><?xml version="1.0" encoding="utf-8"?>
-<p:sld xmlns:a="http://schemas.openxmlformats.org/drawingml/2006/main" xmlns:r="http://schemas.openxmlformats.org/officeDocument/2006/relationships" xmlns:p="http://schemas.openxmlformats.org/presentationml/2006/main">
+<p:sld xmlns:a="http://schemas.openxmlformats.org/drawingml/2006/main" xmlns:r="http://schemas.openxmlformats.org/officeDocument/2006/relationships" xmlns:p="http://schemas.openxmlformats.org/presentationml/2006/main" show="0">
   <p:cSld>
     <p:spTree>
       <p:nvGrpSpPr>
@@ -33822,6 +33823,321 @@
 </file>
 
 <file path=ppt/slides/slide12.xml><?xml version="1.0" encoding="utf-8"?>
+<p:sld xmlns:a="http://schemas.openxmlformats.org/drawingml/2006/main" xmlns:r="http://schemas.openxmlformats.org/officeDocument/2006/relationships" xmlns:p="http://schemas.openxmlformats.org/presentationml/2006/main">
+  <p:cSld>
+    <p:spTree>
+      <p:nvGrpSpPr>
+        <p:cNvPr id="1" name=""/>
+        <p:cNvGrpSpPr/>
+        <p:nvPr/>
+      </p:nvGrpSpPr>
+      <p:grpSpPr>
+        <a:xfrm>
+          <a:off x="0" y="0"/>
+          <a:ext cx="0" cy="0"/>
+          <a:chOff x="0" y="0"/>
+          <a:chExt cx="0" cy="0"/>
+        </a:xfrm>
+      </p:grpSpPr>
+      <p:sp>
+        <p:nvSpPr>
+          <p:cNvPr id="2" name="Titre 1">
+            <a:extLst>
+              <a:ext uri="{FF2B5EF4-FFF2-40B4-BE49-F238E27FC236}">
+                <a16:creationId xmlns:a16="http://schemas.microsoft.com/office/drawing/2014/main" id="{A060C315-E4A0-4375-B7F1-13AE8DC75D86}"/>
+              </a:ext>
+            </a:extLst>
+          </p:cNvPr>
+          <p:cNvSpPr>
+            <a:spLocks noGrp="1"/>
+          </p:cNvSpPr>
+          <p:nvPr>
+            <p:ph type="title"/>
+          </p:nvPr>
+        </p:nvSpPr>
+        <p:spPr/>
+        <p:txBody>
+          <a:bodyPr>
+            <a:normAutofit/>
+          </a:bodyPr>
+          <a:lstStyle/>
+          <a:p>
+            <a:r>
+              <a:rPr lang="fr-FR" dirty="0"/>
+              <a:t>Clustering – </a:t>
+            </a:r>
+            <a:r>
+              <a:rPr lang="fr-FR" dirty="0" err="1">
+                <a:solidFill>
+                  <a:srgbClr val="00B050"/>
+                </a:solidFill>
+              </a:rPr>
+              <a:t>Gaussian</a:t>
+            </a:r>
+            <a:r>
+              <a:rPr lang="fr-FR" dirty="0">
+                <a:solidFill>
+                  <a:srgbClr val="00B050"/>
+                </a:solidFill>
+              </a:rPr>
+              <a:t> Mixture </a:t>
+            </a:r>
+            <a:r>
+              <a:rPr lang="fr-FR" dirty="0" err="1">
+                <a:solidFill>
+                  <a:srgbClr val="00B050"/>
+                </a:solidFill>
+              </a:rPr>
+              <a:t>Models</a:t>
+            </a:r>
+            <a:r>
+              <a:rPr lang="fr-FR" dirty="0"/>
+              <a:t> </a:t>
+            </a:r>
+            <a:r>
+              <a:rPr lang="fr-FR" dirty="0">
+                <a:solidFill>
+                  <a:srgbClr val="00B050"/>
+                </a:solidFill>
+              </a:rPr>
+              <a:t>EFNET 4B</a:t>
+            </a:r>
+            <a:endParaRPr lang="en-US" dirty="0">
+              <a:solidFill>
+                <a:srgbClr val="00B050"/>
+              </a:solidFill>
+            </a:endParaRPr>
+          </a:p>
+        </p:txBody>
+      </p:sp>
+      <p:sp>
+        <p:nvSpPr>
+          <p:cNvPr id="11" name="ZoneTexte 10">
+            <a:extLst>
+              <a:ext uri="{FF2B5EF4-FFF2-40B4-BE49-F238E27FC236}">
+                <a16:creationId xmlns:a16="http://schemas.microsoft.com/office/drawing/2014/main" id="{BE6A7BE1-D8E5-4F28-8D17-B3E8ED1FE625}"/>
+              </a:ext>
+            </a:extLst>
+          </p:cNvPr>
+          <p:cNvSpPr txBox="1"/>
+          <p:nvPr/>
+        </p:nvSpPr>
+        <p:spPr>
+          <a:xfrm>
+            <a:off x="9726705" y="2973869"/>
+            <a:ext cx="1990413" cy="369332"/>
+          </a:xfrm>
+          <a:prstGeom prst="rect">
+            <a:avLst/>
+          </a:prstGeom>
+          <a:solidFill>
+            <a:schemeClr val="bg1">
+              <a:lumMod val="95000"/>
+            </a:schemeClr>
+          </a:solidFill>
+        </p:spPr>
+        <p:txBody>
+          <a:bodyPr wrap="square" rtlCol="0">
+            <a:spAutoFit/>
+          </a:bodyPr>
+          <a:lstStyle/>
+          <a:p>
+            <a:pPr algn="ctr"/>
+            <a:r>
+              <a:rPr lang="fr-FR" dirty="0">
+                <a:solidFill>
+                  <a:srgbClr val="FF0000"/>
+                </a:solidFill>
+                <a:sym typeface="Wingdings" panose="05000000000000000000" pitchFamily="2" charset="2"/>
+              </a:rPr>
+              <a:t>379 </a:t>
+            </a:r>
+            <a:r>
+              <a:rPr lang="fr-FR" dirty="0" err="1">
+                <a:solidFill>
+                  <a:srgbClr val="FF0000"/>
+                </a:solidFill>
+                <a:sym typeface="Wingdings" panose="05000000000000000000" pitchFamily="2" charset="2"/>
+              </a:rPr>
+              <a:t>Features</a:t>
+            </a:r>
+            <a:r>
+              <a:rPr lang="fr-FR" dirty="0">
+                <a:solidFill>
+                  <a:srgbClr val="FF0000"/>
+                </a:solidFill>
+                <a:sym typeface="Wingdings" panose="05000000000000000000" pitchFamily="2" charset="2"/>
+              </a:rPr>
+              <a:t>  2</a:t>
+            </a:r>
+            <a:endParaRPr lang="fr-FR" dirty="0">
+              <a:solidFill>
+                <a:srgbClr val="FF0000"/>
+              </a:solidFill>
+            </a:endParaRPr>
+          </a:p>
+        </p:txBody>
+      </p:sp>
+      <p:sp>
+        <p:nvSpPr>
+          <p:cNvPr id="5" name="ZoneTexte 4">
+            <a:extLst>
+              <a:ext uri="{FF2B5EF4-FFF2-40B4-BE49-F238E27FC236}">
+                <a16:creationId xmlns:a16="http://schemas.microsoft.com/office/drawing/2014/main" id="{3BF1F90F-6D4E-4314-B3DB-1B36468A67E4}"/>
+              </a:ext>
+            </a:extLst>
+          </p:cNvPr>
+          <p:cNvSpPr txBox="1"/>
+          <p:nvPr/>
+        </p:nvSpPr>
+        <p:spPr>
+          <a:xfrm>
+            <a:off x="5137754" y="5795611"/>
+            <a:ext cx="3204882" cy="646331"/>
+          </a:xfrm>
+          <a:prstGeom prst="rect">
+            <a:avLst/>
+          </a:prstGeom>
+          <a:solidFill>
+            <a:schemeClr val="bg1">
+              <a:lumMod val="95000"/>
+            </a:schemeClr>
+          </a:solidFill>
+        </p:spPr>
+        <p:txBody>
+          <a:bodyPr wrap="square" rtlCol="0">
+            <a:spAutoFit/>
+          </a:bodyPr>
+          <a:lstStyle/>
+          <a:p>
+            <a:pPr algn="ctr"/>
+            <a:r>
+              <a:rPr lang="en-US" b="1" dirty="0"/>
+              <a:t>Adjusted Rand Index (ARI) : 0.31</a:t>
+            </a:r>
+          </a:p>
+        </p:txBody>
+      </p:sp>
+      <p:sp>
+        <p:nvSpPr>
+          <p:cNvPr id="6" name="ZoneTexte 5">
+            <a:extLst>
+              <a:ext uri="{FF2B5EF4-FFF2-40B4-BE49-F238E27FC236}">
+                <a16:creationId xmlns:a16="http://schemas.microsoft.com/office/drawing/2014/main" id="{9733D8CC-43CD-45AC-8BD8-AF93425CC62B}"/>
+              </a:ext>
+            </a:extLst>
+          </p:cNvPr>
+          <p:cNvSpPr txBox="1"/>
+          <p:nvPr/>
+        </p:nvSpPr>
+        <p:spPr>
+          <a:xfrm>
+            <a:off x="636993" y="2411506"/>
+            <a:ext cx="2590800" cy="584775"/>
+          </a:xfrm>
+          <a:prstGeom prst="rect">
+            <a:avLst/>
+          </a:prstGeom>
+          <a:noFill/>
+        </p:spPr>
+        <p:txBody>
+          <a:bodyPr wrap="square" rtlCol="0">
+            <a:spAutoFit/>
+          </a:bodyPr>
+          <a:lstStyle/>
+          <a:p>
+            <a:r>
+              <a:rPr lang="fr-FR" dirty="0"/>
+              <a:t>Visualisation via TSNE</a:t>
+            </a:r>
+          </a:p>
+          <a:p>
+            <a:r>
+              <a:rPr lang="fr-FR" sz="1400" dirty="0" err="1"/>
+              <a:t>Perplexity</a:t>
+            </a:r>
+            <a:r>
+              <a:rPr lang="fr-FR" sz="1400" dirty="0"/>
+              <a:t> =30 (50 idem)</a:t>
+            </a:r>
+            <a:endParaRPr lang="en-US" sz="1400" dirty="0"/>
+          </a:p>
+        </p:txBody>
+      </p:sp>
+      <p:pic>
+        <p:nvPicPr>
+          <p:cNvPr id="4" name="Image 3">
+            <a:extLst>
+              <a:ext uri="{FF2B5EF4-FFF2-40B4-BE49-F238E27FC236}">
+                <a16:creationId xmlns:a16="http://schemas.microsoft.com/office/drawing/2014/main" id="{38A17DE8-F4A0-4640-A174-3D64CCC2759E}"/>
+              </a:ext>
+            </a:extLst>
+          </p:cNvPr>
+          <p:cNvPicPr>
+            <a:picLocks noChangeAspect="1"/>
+          </p:cNvPicPr>
+          <p:nvPr/>
+        </p:nvPicPr>
+        <p:blipFill>
+          <a:blip r:embed="rId2"/>
+          <a:stretch>
+            <a:fillRect/>
+          </a:stretch>
+        </p:blipFill>
+        <p:spPr>
+          <a:xfrm>
+            <a:off x="3579909" y="1617150"/>
+            <a:ext cx="5794680" cy="4042800"/>
+          </a:xfrm>
+          <a:prstGeom prst="rect">
+            <a:avLst/>
+          </a:prstGeom>
+        </p:spPr>
+      </p:pic>
+      <p:pic>
+        <p:nvPicPr>
+          <p:cNvPr id="7" name="Image 6">
+            <a:extLst>
+              <a:ext uri="{FF2B5EF4-FFF2-40B4-BE49-F238E27FC236}">
+                <a16:creationId xmlns:a16="http://schemas.microsoft.com/office/drawing/2014/main" id="{F0507020-C4D3-4DD8-81EE-39790C0888C5}"/>
+              </a:ext>
+            </a:extLst>
+          </p:cNvPr>
+          <p:cNvPicPr>
+            <a:picLocks noChangeAspect="1"/>
+          </p:cNvPicPr>
+          <p:nvPr/>
+        </p:nvPicPr>
+        <p:blipFill>
+          <a:blip r:embed="rId3"/>
+          <a:stretch>
+            <a:fillRect/>
+          </a:stretch>
+        </p:blipFill>
+        <p:spPr>
+          <a:xfrm>
+            <a:off x="3579909" y="1617150"/>
+            <a:ext cx="5794680" cy="4042800"/>
+          </a:xfrm>
+          <a:prstGeom prst="rect">
+            <a:avLst/>
+          </a:prstGeom>
+        </p:spPr>
+      </p:pic>
+    </p:spTree>
+    <p:extLst>
+      <p:ext uri="{BB962C8B-B14F-4D97-AF65-F5344CB8AC3E}">
+        <p14:creationId xmlns:p14="http://schemas.microsoft.com/office/powerpoint/2010/main" val="3233541987"/>
+      </p:ext>
+    </p:extLst>
+  </p:cSld>
+  <p:clrMapOvr>
+    <a:masterClrMapping/>
+  </p:clrMapOvr>
+</p:sld>
+</file>
+
+<file path=ppt/slides/slide13.xml><?xml version="1.0" encoding="utf-8"?>
 <p:sld xmlns:a="http://schemas.openxmlformats.org/drawingml/2006/main" xmlns:r="http://schemas.openxmlformats.org/officeDocument/2006/relationships" xmlns:p="http://schemas.openxmlformats.org/presentationml/2006/main">
   <p:cSld>
     <p:spTree>
@@ -34020,7 +34336,7 @@
 </p:sld>
 </file>
 
-<file path=ppt/slides/slide13.xml><?xml version="1.0" encoding="utf-8"?>
+<file path=ppt/slides/slide14.xml><?xml version="1.0" encoding="utf-8"?>
 <p:sld xmlns:a="http://schemas.openxmlformats.org/drawingml/2006/main" xmlns:r="http://schemas.openxmlformats.org/officeDocument/2006/relationships" xmlns:p="http://schemas.openxmlformats.org/presentationml/2006/main" show="0">
   <p:cSld>
     <p:spTree>
@@ -34487,7 +34803,7 @@
 </p:sld>
 </file>
 
-<file path=ppt/slides/slide14.xml><?xml version="1.0" encoding="utf-8"?>
+<file path=ppt/slides/slide15.xml><?xml version="1.0" encoding="utf-8"?>
 <p:sld xmlns:a="http://schemas.openxmlformats.org/drawingml/2006/main" xmlns:r="http://schemas.openxmlformats.org/officeDocument/2006/relationships" xmlns:p="http://schemas.openxmlformats.org/presentationml/2006/main" show="0">
   <p:cSld>
     <p:spTree>
@@ -34954,7 +35270,7 @@
 </p:sld>
 </file>
 
-<file path=ppt/slides/slide15.xml><?xml version="1.0" encoding="utf-8"?>
+<file path=ppt/slides/slide16.xml><?xml version="1.0" encoding="utf-8"?>
 <p:sld xmlns:a="http://schemas.openxmlformats.org/drawingml/2006/main" xmlns:r="http://schemas.openxmlformats.org/officeDocument/2006/relationships" xmlns:p="http://schemas.openxmlformats.org/presentationml/2006/main">
   <p:cSld>
     <p:spTree>
@@ -35470,7 +35786,7 @@
 </p:sld>
 </file>
 
-<file path=ppt/slides/slide16.xml><?xml version="1.0" encoding="utf-8"?>
+<file path=ppt/slides/slide17.xml><?xml version="1.0" encoding="utf-8"?>
 <p:sld xmlns:a="http://schemas.openxmlformats.org/drawingml/2006/main" xmlns:r="http://schemas.openxmlformats.org/officeDocument/2006/relationships" xmlns:p="http://schemas.openxmlformats.org/presentationml/2006/main">
   <p:cSld>
     <p:spTree>
@@ -37398,8 +37714,8 @@
         </p:blipFill>
         <p:spPr>
           <a:xfrm>
-            <a:off x="8285968" y="820132"/>
-            <a:ext cx="3839415" cy="2959200"/>
+            <a:off x="8567944" y="808351"/>
+            <a:ext cx="3513887" cy="2708302"/>
           </a:xfrm>
           <a:prstGeom prst="rect">
             <a:avLst/>
@@ -37552,7 +37868,7 @@
 </p:sld>
 </file>
 
-<file path=ppt/slides/slide17.xml><?xml version="1.0" encoding="utf-8"?>
+<file path=ppt/slides/slide18.xml><?xml version="1.0" encoding="utf-8"?>
 <p:sld xmlns:a="http://schemas.openxmlformats.org/drawingml/2006/main" xmlns:r="http://schemas.openxmlformats.org/officeDocument/2006/relationships" xmlns:p="http://schemas.openxmlformats.org/presentationml/2006/main" show="0">
   <p:cSld>
     <p:spTree>
@@ -38163,7 +38479,7 @@
 </p:sld>
 </file>
 
-<file path=ppt/slides/slide18.xml><?xml version="1.0" encoding="utf-8"?>
+<file path=ppt/slides/slide19.xml><?xml version="1.0" encoding="utf-8"?>
 <p:sld xmlns:a="http://schemas.openxmlformats.org/drawingml/2006/main" xmlns:r="http://schemas.openxmlformats.org/officeDocument/2006/relationships" xmlns:p="http://schemas.openxmlformats.org/presentationml/2006/main">
   <p:cSld>
     <p:spTree>
@@ -38307,7 +38623,593 @@
 </p:sld>
 </file>
 
-<file path=ppt/slides/slide19.xml><?xml version="1.0" encoding="utf-8"?>
+<file path=ppt/slides/slide2.xml><?xml version="1.0" encoding="utf-8"?>
+<p:sld xmlns:a="http://schemas.openxmlformats.org/drawingml/2006/main" xmlns:r="http://schemas.openxmlformats.org/officeDocument/2006/relationships" xmlns:p="http://schemas.openxmlformats.org/presentationml/2006/main">
+  <p:cSld>
+    <p:spTree>
+      <p:nvGrpSpPr>
+        <p:cNvPr id="1" name=""/>
+        <p:cNvGrpSpPr/>
+        <p:nvPr/>
+      </p:nvGrpSpPr>
+      <p:grpSpPr>
+        <a:xfrm>
+          <a:off x="0" y="0"/>
+          <a:ext cx="0" cy="0"/>
+          <a:chOff x="0" y="0"/>
+          <a:chExt cx="0" cy="0"/>
+        </a:xfrm>
+      </p:grpSpPr>
+      <p:sp>
+        <p:nvSpPr>
+          <p:cNvPr id="2" name="Titre 1">
+            <a:extLst>
+              <a:ext uri="{FF2B5EF4-FFF2-40B4-BE49-F238E27FC236}">
+                <a16:creationId xmlns:a16="http://schemas.microsoft.com/office/drawing/2014/main" id="{7C60674E-D216-4596-AAB6-06FA1F965066}"/>
+              </a:ext>
+            </a:extLst>
+          </p:cNvPr>
+          <p:cNvSpPr>
+            <a:spLocks noGrp="1"/>
+          </p:cNvSpPr>
+          <p:nvPr>
+            <p:ph type="title"/>
+          </p:nvPr>
+        </p:nvSpPr>
+        <p:spPr>
+          <a:xfrm>
+            <a:off x="823384" y="3078838"/>
+            <a:ext cx="8596668" cy="1320800"/>
+          </a:xfrm>
+        </p:spPr>
+        <p:txBody>
+          <a:bodyPr/>
+          <a:lstStyle/>
+          <a:p>
+            <a:r>
+              <a:rPr lang="fr-FR" dirty="0"/>
+              <a:t>DATASET</a:t>
+            </a:r>
+            <a:endParaRPr lang="en-US" dirty="0"/>
+          </a:p>
+        </p:txBody>
+      </p:sp>
+      <p:sp>
+        <p:nvSpPr>
+          <p:cNvPr id="3" name="Espace réservé du contenu 2">
+            <a:extLst>
+              <a:ext uri="{FF2B5EF4-FFF2-40B4-BE49-F238E27FC236}">
+                <a16:creationId xmlns:a16="http://schemas.microsoft.com/office/drawing/2014/main" id="{5BC3718D-6DD1-4DA2-ACC3-D7101805B5B4}"/>
+              </a:ext>
+            </a:extLst>
+          </p:cNvPr>
+          <p:cNvSpPr>
+            <a:spLocks noGrp="1"/>
+          </p:cNvSpPr>
+          <p:nvPr>
+            <p:ph idx="1"/>
+          </p:nvPr>
+        </p:nvSpPr>
+        <p:spPr>
+          <a:xfrm>
+            <a:off x="823384" y="3813197"/>
+            <a:ext cx="8930485" cy="2529332"/>
+          </a:xfrm>
+        </p:spPr>
+        <p:txBody>
+          <a:bodyPr>
+            <a:normAutofit lnSpcReduction="10000"/>
+          </a:bodyPr>
+          <a:lstStyle/>
+          <a:p>
+            <a:pPr marL="0" indent="0">
+              <a:buNone/>
+            </a:pPr>
+            <a:r>
+              <a:rPr lang="fr-FR" b="1" dirty="0">
+                <a:solidFill>
+                  <a:schemeClr val="accent1"/>
+                </a:solidFill>
+              </a:rPr>
+              <a:t>1506 clichés de radiographie: </a:t>
+            </a:r>
+          </a:p>
+          <a:p>
+            <a:pPr marL="457200" lvl="1" indent="0">
+              <a:buNone/>
+            </a:pPr>
+            <a:r>
+              <a:rPr lang="fr-FR" dirty="0"/>
+              <a:t>50 étiquetées « CANCER »</a:t>
+            </a:r>
+          </a:p>
+          <a:p>
+            <a:pPr marL="457200" lvl="1" indent="0">
+              <a:buNone/>
+            </a:pPr>
+            <a:r>
+              <a:rPr lang="fr-FR" dirty="0"/>
+              <a:t>50 étiquetées « NORMAL »</a:t>
+            </a:r>
+          </a:p>
+          <a:p>
+            <a:pPr marL="457200" lvl="1" indent="0">
+              <a:buNone/>
+            </a:pPr>
+            <a:r>
+              <a:rPr lang="fr-FR" dirty="0"/>
+              <a:t>1406 non étiquetées</a:t>
+            </a:r>
+          </a:p>
+          <a:p>
+            <a:pPr marL="57150" indent="0">
+              <a:buNone/>
+            </a:pPr>
+            <a:endParaRPr lang="fr-FR" sz="1600" dirty="0"/>
+          </a:p>
+          <a:p>
+            <a:pPr marL="57150" indent="0">
+              <a:buNone/>
+            </a:pPr>
+            <a:r>
+              <a:rPr lang="fr-FR" b="1" dirty="0">
+                <a:solidFill>
+                  <a:schemeClr val="accent1"/>
+                </a:solidFill>
+              </a:rPr>
+              <a:t>Résolution unique 512 x 512 pixels.</a:t>
+            </a:r>
+          </a:p>
+          <a:p>
+            <a:pPr marL="57150" indent="0">
+              <a:buNone/>
+            </a:pPr>
+            <a:r>
+              <a:rPr lang="fr-FR" b="1" dirty="0">
+                <a:solidFill>
+                  <a:schemeClr val="accent1"/>
+                </a:solidFill>
+              </a:rPr>
+              <a:t>Mode RGB</a:t>
+            </a:r>
+          </a:p>
+          <a:p>
+            <a:pPr marL="457200" lvl="1" indent="0">
+              <a:buNone/>
+            </a:pPr>
+            <a:endParaRPr lang="fr-FR" dirty="0"/>
+          </a:p>
+          <a:p>
+            <a:pPr marL="457200" lvl="1" indent="0">
+              <a:buNone/>
+            </a:pPr>
+            <a:endParaRPr lang="fr-FR" dirty="0"/>
+          </a:p>
+        </p:txBody>
+      </p:sp>
+      <p:sp>
+        <p:nvSpPr>
+          <p:cNvPr id="4" name="Titre 1">
+            <a:extLst>
+              <a:ext uri="{FF2B5EF4-FFF2-40B4-BE49-F238E27FC236}">
+                <a16:creationId xmlns:a16="http://schemas.microsoft.com/office/drawing/2014/main" id="{BA8C6C45-8921-46EE-9C07-175E1093E14C}"/>
+              </a:ext>
+            </a:extLst>
+          </p:cNvPr>
+          <p:cNvSpPr txBox="1">
+            <a:spLocks/>
+          </p:cNvSpPr>
+          <p:nvPr/>
+        </p:nvSpPr>
+        <p:spPr>
+          <a:xfrm>
+            <a:off x="823384" y="723254"/>
+            <a:ext cx="8596668" cy="1320800"/>
+          </a:xfrm>
+          <a:prstGeom prst="rect">
+            <a:avLst/>
+          </a:prstGeom>
+        </p:spPr>
+        <p:txBody>
+          <a:bodyPr vert="horz" lIns="91440" tIns="45720" rIns="91440" bIns="45720" rtlCol="0" anchor="t">
+            <a:normAutofit/>
+          </a:bodyPr>
+          <a:lstStyle>
+            <a:lvl1pPr algn="l" defTabSz="457200" rtl="0" eaLnBrk="1" latinLnBrk="0" hangingPunct="1">
+              <a:spcBef>
+                <a:spcPct val="0"/>
+              </a:spcBef>
+              <a:buNone/>
+              <a:defRPr sz="3600" kern="1200">
+                <a:solidFill>
+                  <a:schemeClr val="accent1"/>
+                </a:solidFill>
+                <a:latin typeface="+mj-lt"/>
+                <a:ea typeface="+mj-ea"/>
+                <a:cs typeface="+mj-cs"/>
+              </a:defRPr>
+            </a:lvl1pPr>
+            <a:lvl2pPr eaLnBrk="1" hangingPunct="1">
+              <a:defRPr>
+                <a:solidFill>
+                  <a:schemeClr val="tx2"/>
+                </a:solidFill>
+              </a:defRPr>
+            </a:lvl2pPr>
+            <a:lvl3pPr eaLnBrk="1" hangingPunct="1">
+              <a:defRPr>
+                <a:solidFill>
+                  <a:schemeClr val="tx2"/>
+                </a:solidFill>
+              </a:defRPr>
+            </a:lvl3pPr>
+            <a:lvl4pPr eaLnBrk="1" hangingPunct="1">
+              <a:defRPr>
+                <a:solidFill>
+                  <a:schemeClr val="tx2"/>
+                </a:solidFill>
+              </a:defRPr>
+            </a:lvl4pPr>
+            <a:lvl5pPr eaLnBrk="1" hangingPunct="1">
+              <a:defRPr>
+                <a:solidFill>
+                  <a:schemeClr val="tx2"/>
+                </a:solidFill>
+              </a:defRPr>
+            </a:lvl5pPr>
+            <a:lvl6pPr eaLnBrk="1" hangingPunct="1">
+              <a:defRPr>
+                <a:solidFill>
+                  <a:schemeClr val="tx2"/>
+                </a:solidFill>
+              </a:defRPr>
+            </a:lvl6pPr>
+            <a:lvl7pPr eaLnBrk="1" hangingPunct="1">
+              <a:defRPr>
+                <a:solidFill>
+                  <a:schemeClr val="tx2"/>
+                </a:solidFill>
+              </a:defRPr>
+            </a:lvl7pPr>
+            <a:lvl8pPr eaLnBrk="1" hangingPunct="1">
+              <a:defRPr>
+                <a:solidFill>
+                  <a:schemeClr val="tx2"/>
+                </a:solidFill>
+              </a:defRPr>
+            </a:lvl8pPr>
+            <a:lvl9pPr eaLnBrk="1" hangingPunct="1">
+              <a:defRPr>
+                <a:solidFill>
+                  <a:schemeClr val="tx2"/>
+                </a:solidFill>
+              </a:defRPr>
+            </a:lvl9pPr>
+          </a:lstStyle>
+          <a:p>
+            <a:r>
+              <a:rPr lang="fr-FR" dirty="0"/>
+              <a:t>OBJECTIF</a:t>
+            </a:r>
+            <a:endParaRPr lang="en-US" dirty="0"/>
+          </a:p>
+        </p:txBody>
+      </p:sp>
+      <p:sp>
+        <p:nvSpPr>
+          <p:cNvPr id="5" name="Espace réservé du contenu 2">
+            <a:extLst>
+              <a:ext uri="{FF2B5EF4-FFF2-40B4-BE49-F238E27FC236}">
+                <a16:creationId xmlns:a16="http://schemas.microsoft.com/office/drawing/2014/main" id="{4DB361C3-BBE6-4A46-9285-88ACA862555F}"/>
+              </a:ext>
+            </a:extLst>
+          </p:cNvPr>
+          <p:cNvSpPr txBox="1">
+            <a:spLocks/>
+          </p:cNvSpPr>
+          <p:nvPr/>
+        </p:nvSpPr>
+        <p:spPr>
+          <a:xfrm>
+            <a:off x="823384" y="1585139"/>
+            <a:ext cx="3998743" cy="1126519"/>
+          </a:xfrm>
+          <a:prstGeom prst="rect">
+            <a:avLst/>
+          </a:prstGeom>
+        </p:spPr>
+        <p:txBody>
+          <a:bodyPr vert="horz" lIns="91440" tIns="45720" rIns="91440" bIns="45720" rtlCol="0">
+            <a:normAutofit/>
+          </a:bodyPr>
+          <a:lstStyle>
+            <a:lvl1pPr marL="342900" indent="-342900" algn="l" defTabSz="457200" rtl="0" eaLnBrk="1" latinLnBrk="0" hangingPunct="1">
+              <a:spcBef>
+                <a:spcPts val="1000"/>
+              </a:spcBef>
+              <a:spcAft>
+                <a:spcPts val="0"/>
+              </a:spcAft>
+              <a:buClr>
+                <a:schemeClr val="accent1"/>
+              </a:buClr>
+              <a:buSzPct val="80000"/>
+              <a:buFont typeface="Wingdings 3" charset="2"/>
+              <a:buChar char=""/>
+              <a:defRPr sz="1800" kern="1200">
+                <a:solidFill>
+                  <a:schemeClr val="tx1">
+                    <a:lumMod val="75000"/>
+                    <a:lumOff val="25000"/>
+                  </a:schemeClr>
+                </a:solidFill>
+                <a:latin typeface="+mn-lt"/>
+                <a:ea typeface="+mn-ea"/>
+                <a:cs typeface="+mn-cs"/>
+              </a:defRPr>
+            </a:lvl1pPr>
+            <a:lvl2pPr marL="742950" indent="-285750" algn="l" defTabSz="457200" rtl="0" eaLnBrk="1" latinLnBrk="0" hangingPunct="1">
+              <a:spcBef>
+                <a:spcPts val="1000"/>
+              </a:spcBef>
+              <a:spcAft>
+                <a:spcPts val="0"/>
+              </a:spcAft>
+              <a:buClr>
+                <a:schemeClr val="accent1"/>
+              </a:buClr>
+              <a:buSzPct val="80000"/>
+              <a:buFont typeface="Wingdings 3" charset="2"/>
+              <a:buChar char=""/>
+              <a:defRPr sz="1600" kern="1200">
+                <a:solidFill>
+                  <a:schemeClr val="tx1">
+                    <a:lumMod val="75000"/>
+                    <a:lumOff val="25000"/>
+                  </a:schemeClr>
+                </a:solidFill>
+                <a:latin typeface="+mn-lt"/>
+                <a:ea typeface="+mn-ea"/>
+                <a:cs typeface="+mn-cs"/>
+              </a:defRPr>
+            </a:lvl2pPr>
+            <a:lvl3pPr marL="1143000" indent="-228600" algn="l" defTabSz="457200" rtl="0" eaLnBrk="1" latinLnBrk="0" hangingPunct="1">
+              <a:spcBef>
+                <a:spcPts val="1000"/>
+              </a:spcBef>
+              <a:spcAft>
+                <a:spcPts val="0"/>
+              </a:spcAft>
+              <a:buClr>
+                <a:schemeClr val="accent1"/>
+              </a:buClr>
+              <a:buSzPct val="80000"/>
+              <a:buFont typeface="Wingdings 3" charset="2"/>
+              <a:buChar char=""/>
+              <a:defRPr sz="1400" kern="1200">
+                <a:solidFill>
+                  <a:schemeClr val="tx1">
+                    <a:lumMod val="75000"/>
+                    <a:lumOff val="25000"/>
+                  </a:schemeClr>
+                </a:solidFill>
+                <a:latin typeface="+mn-lt"/>
+                <a:ea typeface="+mn-ea"/>
+                <a:cs typeface="+mn-cs"/>
+              </a:defRPr>
+            </a:lvl3pPr>
+            <a:lvl4pPr marL="1600200" indent="-228600" algn="l" defTabSz="457200" rtl="0" eaLnBrk="1" latinLnBrk="0" hangingPunct="1">
+              <a:spcBef>
+                <a:spcPts val="1000"/>
+              </a:spcBef>
+              <a:spcAft>
+                <a:spcPts val="0"/>
+              </a:spcAft>
+              <a:buClr>
+                <a:schemeClr val="accent1"/>
+              </a:buClr>
+              <a:buSzPct val="80000"/>
+              <a:buFont typeface="Wingdings 3" charset="2"/>
+              <a:buChar char=""/>
+              <a:defRPr sz="1200" kern="1200">
+                <a:solidFill>
+                  <a:schemeClr val="tx1">
+                    <a:lumMod val="75000"/>
+                    <a:lumOff val="25000"/>
+                  </a:schemeClr>
+                </a:solidFill>
+                <a:latin typeface="+mn-lt"/>
+                <a:ea typeface="+mn-ea"/>
+                <a:cs typeface="+mn-cs"/>
+              </a:defRPr>
+            </a:lvl4pPr>
+            <a:lvl5pPr marL="2057400" indent="-228600" algn="l" defTabSz="457200" rtl="0" eaLnBrk="1" latinLnBrk="0" hangingPunct="1">
+              <a:spcBef>
+                <a:spcPts val="1000"/>
+              </a:spcBef>
+              <a:spcAft>
+                <a:spcPts val="0"/>
+              </a:spcAft>
+              <a:buClr>
+                <a:schemeClr val="accent1"/>
+              </a:buClr>
+              <a:buSzPct val="80000"/>
+              <a:buFont typeface="Wingdings 3" charset="2"/>
+              <a:buChar char=""/>
+              <a:defRPr sz="1200" kern="1200">
+                <a:solidFill>
+                  <a:schemeClr val="tx1">
+                    <a:lumMod val="75000"/>
+                    <a:lumOff val="25000"/>
+                  </a:schemeClr>
+                </a:solidFill>
+                <a:latin typeface="+mn-lt"/>
+                <a:ea typeface="+mn-ea"/>
+                <a:cs typeface="+mn-cs"/>
+              </a:defRPr>
+            </a:lvl5pPr>
+            <a:lvl6pPr marL="2514600" indent="-228600" algn="l" defTabSz="457200" rtl="0" eaLnBrk="1" latinLnBrk="0" hangingPunct="1">
+              <a:spcBef>
+                <a:spcPts val="1000"/>
+              </a:spcBef>
+              <a:spcAft>
+                <a:spcPts val="0"/>
+              </a:spcAft>
+              <a:buClr>
+                <a:schemeClr val="accent1"/>
+              </a:buClr>
+              <a:buSzPct val="80000"/>
+              <a:buFont typeface="Wingdings 3" charset="2"/>
+              <a:buChar char=""/>
+              <a:defRPr sz="1200" kern="1200">
+                <a:solidFill>
+                  <a:schemeClr val="tx1">
+                    <a:lumMod val="75000"/>
+                    <a:lumOff val="25000"/>
+                  </a:schemeClr>
+                </a:solidFill>
+                <a:latin typeface="+mn-lt"/>
+                <a:ea typeface="+mn-ea"/>
+                <a:cs typeface="+mn-cs"/>
+              </a:defRPr>
+            </a:lvl6pPr>
+            <a:lvl7pPr marL="2971800" indent="-228600" algn="l" defTabSz="457200" rtl="0" eaLnBrk="1" latinLnBrk="0" hangingPunct="1">
+              <a:spcBef>
+                <a:spcPts val="1000"/>
+              </a:spcBef>
+              <a:spcAft>
+                <a:spcPts val="0"/>
+              </a:spcAft>
+              <a:buClr>
+                <a:schemeClr val="accent1"/>
+              </a:buClr>
+              <a:buSzPct val="80000"/>
+              <a:buFont typeface="Wingdings 3" charset="2"/>
+              <a:buChar char=""/>
+              <a:defRPr sz="1200" kern="1200">
+                <a:solidFill>
+                  <a:schemeClr val="tx1">
+                    <a:lumMod val="75000"/>
+                    <a:lumOff val="25000"/>
+                  </a:schemeClr>
+                </a:solidFill>
+                <a:latin typeface="+mn-lt"/>
+                <a:ea typeface="+mn-ea"/>
+                <a:cs typeface="+mn-cs"/>
+              </a:defRPr>
+            </a:lvl7pPr>
+            <a:lvl8pPr marL="3429000" indent="-228600" algn="l" defTabSz="457200" rtl="0" eaLnBrk="1" latinLnBrk="0" hangingPunct="1">
+              <a:spcBef>
+                <a:spcPts val="1000"/>
+              </a:spcBef>
+              <a:spcAft>
+                <a:spcPts val="0"/>
+              </a:spcAft>
+              <a:buClr>
+                <a:schemeClr val="accent1"/>
+              </a:buClr>
+              <a:buSzPct val="80000"/>
+              <a:buFont typeface="Wingdings 3" charset="2"/>
+              <a:buChar char=""/>
+              <a:defRPr sz="1200" kern="1200">
+                <a:solidFill>
+                  <a:schemeClr val="tx1">
+                    <a:lumMod val="75000"/>
+                    <a:lumOff val="25000"/>
+                  </a:schemeClr>
+                </a:solidFill>
+                <a:latin typeface="+mn-lt"/>
+                <a:ea typeface="+mn-ea"/>
+                <a:cs typeface="+mn-cs"/>
+              </a:defRPr>
+            </a:lvl8pPr>
+            <a:lvl9pPr marL="3886200" indent="-228600" algn="l" defTabSz="457200" rtl="0" eaLnBrk="1" latinLnBrk="0" hangingPunct="1">
+              <a:spcBef>
+                <a:spcPts val="1000"/>
+              </a:spcBef>
+              <a:spcAft>
+                <a:spcPts val="0"/>
+              </a:spcAft>
+              <a:buClr>
+                <a:schemeClr val="accent1"/>
+              </a:buClr>
+              <a:buSzPct val="80000"/>
+              <a:buFont typeface="Wingdings 3" charset="2"/>
+              <a:buChar char=""/>
+              <a:defRPr sz="1200" kern="1200">
+                <a:solidFill>
+                  <a:schemeClr val="tx1">
+                    <a:lumMod val="75000"/>
+                    <a:lumOff val="25000"/>
+                  </a:schemeClr>
+                </a:solidFill>
+                <a:latin typeface="+mn-lt"/>
+                <a:ea typeface="+mn-ea"/>
+                <a:cs typeface="+mn-cs"/>
+              </a:defRPr>
+            </a:lvl9pPr>
+          </a:lstStyle>
+          <a:p>
+            <a:pPr marL="0" indent="0" algn="just">
+              <a:buNone/>
+            </a:pPr>
+            <a:r>
+              <a:rPr lang="fr-FR" dirty="0"/>
+              <a:t>Automatiser la détection de tumeurs sur des radiographies de cerveaux humains.</a:t>
+            </a:r>
+          </a:p>
+          <a:p>
+            <a:pPr marL="0" indent="0" algn="just">
+              <a:buNone/>
+            </a:pPr>
+            <a:endParaRPr lang="fr-FR" dirty="0"/>
+          </a:p>
+        </p:txBody>
+      </p:sp>
+      <p:pic>
+        <p:nvPicPr>
+          <p:cNvPr id="11" name="Image 10">
+            <a:extLst>
+              <a:ext uri="{FF2B5EF4-FFF2-40B4-BE49-F238E27FC236}">
+                <a16:creationId xmlns:a16="http://schemas.microsoft.com/office/drawing/2014/main" id="{F27BFDFA-0075-4C49-AA56-ECC86CC31230}"/>
+              </a:ext>
+            </a:extLst>
+          </p:cNvPr>
+          <p:cNvPicPr>
+            <a:picLocks noChangeAspect="1"/>
+          </p:cNvPicPr>
+          <p:nvPr/>
+        </p:nvPicPr>
+        <p:blipFill>
+          <a:blip r:embed="rId2"/>
+          <a:stretch>
+            <a:fillRect/>
+          </a:stretch>
+        </p:blipFill>
+        <p:spPr>
+          <a:xfrm>
+            <a:off x="5121718" y="387653"/>
+            <a:ext cx="6743469" cy="6242779"/>
+          </a:xfrm>
+          <a:prstGeom prst="rect">
+            <a:avLst/>
+          </a:prstGeom>
+        </p:spPr>
+      </p:pic>
+    </p:spTree>
+    <p:extLst>
+      <p:ext uri="{BB962C8B-B14F-4D97-AF65-F5344CB8AC3E}">
+        <p14:creationId xmlns:p14="http://schemas.microsoft.com/office/powerpoint/2010/main" val="1436561955"/>
+      </p:ext>
+    </p:extLst>
+  </p:cSld>
+  <p:clrMapOvr>
+    <a:masterClrMapping/>
+  </p:clrMapOvr>
+</p:sld>
+</file>
+
+<file path=ppt/slides/slide20.xml><?xml version="1.0" encoding="utf-8"?>
 <p:sld xmlns:a="http://schemas.openxmlformats.org/drawingml/2006/main" xmlns:r="http://schemas.openxmlformats.org/officeDocument/2006/relationships" xmlns:p="http://schemas.openxmlformats.org/presentationml/2006/main">
   <p:cSld>
     <p:spTree>
@@ -38836,593 +39738,7 @@
 </p:sld>
 </file>
 
-<file path=ppt/slides/slide2.xml><?xml version="1.0" encoding="utf-8"?>
-<p:sld xmlns:a="http://schemas.openxmlformats.org/drawingml/2006/main" xmlns:r="http://schemas.openxmlformats.org/officeDocument/2006/relationships" xmlns:p="http://schemas.openxmlformats.org/presentationml/2006/main">
-  <p:cSld>
-    <p:spTree>
-      <p:nvGrpSpPr>
-        <p:cNvPr id="1" name=""/>
-        <p:cNvGrpSpPr/>
-        <p:nvPr/>
-      </p:nvGrpSpPr>
-      <p:grpSpPr>
-        <a:xfrm>
-          <a:off x="0" y="0"/>
-          <a:ext cx="0" cy="0"/>
-          <a:chOff x="0" y="0"/>
-          <a:chExt cx="0" cy="0"/>
-        </a:xfrm>
-      </p:grpSpPr>
-      <p:sp>
-        <p:nvSpPr>
-          <p:cNvPr id="2" name="Titre 1">
-            <a:extLst>
-              <a:ext uri="{FF2B5EF4-FFF2-40B4-BE49-F238E27FC236}">
-                <a16:creationId xmlns:a16="http://schemas.microsoft.com/office/drawing/2014/main" id="{7C60674E-D216-4596-AAB6-06FA1F965066}"/>
-              </a:ext>
-            </a:extLst>
-          </p:cNvPr>
-          <p:cNvSpPr>
-            <a:spLocks noGrp="1"/>
-          </p:cNvSpPr>
-          <p:nvPr>
-            <p:ph type="title"/>
-          </p:nvPr>
-        </p:nvSpPr>
-        <p:spPr>
-          <a:xfrm>
-            <a:off x="823384" y="3078838"/>
-            <a:ext cx="8596668" cy="1320800"/>
-          </a:xfrm>
-        </p:spPr>
-        <p:txBody>
-          <a:bodyPr/>
-          <a:lstStyle/>
-          <a:p>
-            <a:r>
-              <a:rPr lang="fr-FR" dirty="0"/>
-              <a:t>DATASET</a:t>
-            </a:r>
-            <a:endParaRPr lang="en-US" dirty="0"/>
-          </a:p>
-        </p:txBody>
-      </p:sp>
-      <p:sp>
-        <p:nvSpPr>
-          <p:cNvPr id="3" name="Espace réservé du contenu 2">
-            <a:extLst>
-              <a:ext uri="{FF2B5EF4-FFF2-40B4-BE49-F238E27FC236}">
-                <a16:creationId xmlns:a16="http://schemas.microsoft.com/office/drawing/2014/main" id="{5BC3718D-6DD1-4DA2-ACC3-D7101805B5B4}"/>
-              </a:ext>
-            </a:extLst>
-          </p:cNvPr>
-          <p:cNvSpPr>
-            <a:spLocks noGrp="1"/>
-          </p:cNvSpPr>
-          <p:nvPr>
-            <p:ph idx="1"/>
-          </p:nvPr>
-        </p:nvSpPr>
-        <p:spPr>
-          <a:xfrm>
-            <a:off x="823384" y="3813197"/>
-            <a:ext cx="8930485" cy="2529332"/>
-          </a:xfrm>
-        </p:spPr>
-        <p:txBody>
-          <a:bodyPr>
-            <a:normAutofit lnSpcReduction="10000"/>
-          </a:bodyPr>
-          <a:lstStyle/>
-          <a:p>
-            <a:pPr marL="0" indent="0">
-              <a:buNone/>
-            </a:pPr>
-            <a:r>
-              <a:rPr lang="fr-FR" b="1" dirty="0">
-                <a:solidFill>
-                  <a:schemeClr val="accent1"/>
-                </a:solidFill>
-              </a:rPr>
-              <a:t>1506 clichés de radiographie: </a:t>
-            </a:r>
-          </a:p>
-          <a:p>
-            <a:pPr marL="457200" lvl="1" indent="0">
-              <a:buNone/>
-            </a:pPr>
-            <a:r>
-              <a:rPr lang="fr-FR" dirty="0"/>
-              <a:t>50 étiquetées « CANCER »</a:t>
-            </a:r>
-          </a:p>
-          <a:p>
-            <a:pPr marL="457200" lvl="1" indent="0">
-              <a:buNone/>
-            </a:pPr>
-            <a:r>
-              <a:rPr lang="fr-FR" dirty="0"/>
-              <a:t>50 étiquetées « NORMAL »</a:t>
-            </a:r>
-          </a:p>
-          <a:p>
-            <a:pPr marL="457200" lvl="1" indent="0">
-              <a:buNone/>
-            </a:pPr>
-            <a:r>
-              <a:rPr lang="fr-FR" dirty="0"/>
-              <a:t>1406 non étiquetées</a:t>
-            </a:r>
-          </a:p>
-          <a:p>
-            <a:pPr marL="57150" indent="0">
-              <a:buNone/>
-            </a:pPr>
-            <a:endParaRPr lang="fr-FR" sz="1600" dirty="0"/>
-          </a:p>
-          <a:p>
-            <a:pPr marL="57150" indent="0">
-              <a:buNone/>
-            </a:pPr>
-            <a:r>
-              <a:rPr lang="fr-FR" b="1" dirty="0">
-                <a:solidFill>
-                  <a:schemeClr val="accent1"/>
-                </a:solidFill>
-              </a:rPr>
-              <a:t>Résolution unique 512 x 512 pixels.</a:t>
-            </a:r>
-          </a:p>
-          <a:p>
-            <a:pPr marL="57150" indent="0">
-              <a:buNone/>
-            </a:pPr>
-            <a:r>
-              <a:rPr lang="fr-FR" b="1" dirty="0">
-                <a:solidFill>
-                  <a:schemeClr val="accent1"/>
-                </a:solidFill>
-              </a:rPr>
-              <a:t>Mode RGB</a:t>
-            </a:r>
-          </a:p>
-          <a:p>
-            <a:pPr marL="457200" lvl="1" indent="0">
-              <a:buNone/>
-            </a:pPr>
-            <a:endParaRPr lang="fr-FR" dirty="0"/>
-          </a:p>
-          <a:p>
-            <a:pPr marL="457200" lvl="1" indent="0">
-              <a:buNone/>
-            </a:pPr>
-            <a:endParaRPr lang="fr-FR" dirty="0"/>
-          </a:p>
-        </p:txBody>
-      </p:sp>
-      <p:sp>
-        <p:nvSpPr>
-          <p:cNvPr id="4" name="Titre 1">
-            <a:extLst>
-              <a:ext uri="{FF2B5EF4-FFF2-40B4-BE49-F238E27FC236}">
-                <a16:creationId xmlns:a16="http://schemas.microsoft.com/office/drawing/2014/main" id="{BA8C6C45-8921-46EE-9C07-175E1093E14C}"/>
-              </a:ext>
-            </a:extLst>
-          </p:cNvPr>
-          <p:cNvSpPr txBox="1">
-            <a:spLocks/>
-          </p:cNvSpPr>
-          <p:nvPr/>
-        </p:nvSpPr>
-        <p:spPr>
-          <a:xfrm>
-            <a:off x="823384" y="723254"/>
-            <a:ext cx="8596668" cy="1320800"/>
-          </a:xfrm>
-          <a:prstGeom prst="rect">
-            <a:avLst/>
-          </a:prstGeom>
-        </p:spPr>
-        <p:txBody>
-          <a:bodyPr vert="horz" lIns="91440" tIns="45720" rIns="91440" bIns="45720" rtlCol="0" anchor="t">
-            <a:normAutofit/>
-          </a:bodyPr>
-          <a:lstStyle>
-            <a:lvl1pPr algn="l" defTabSz="457200" rtl="0" eaLnBrk="1" latinLnBrk="0" hangingPunct="1">
-              <a:spcBef>
-                <a:spcPct val="0"/>
-              </a:spcBef>
-              <a:buNone/>
-              <a:defRPr sz="3600" kern="1200">
-                <a:solidFill>
-                  <a:schemeClr val="accent1"/>
-                </a:solidFill>
-                <a:latin typeface="+mj-lt"/>
-                <a:ea typeface="+mj-ea"/>
-                <a:cs typeface="+mj-cs"/>
-              </a:defRPr>
-            </a:lvl1pPr>
-            <a:lvl2pPr eaLnBrk="1" hangingPunct="1">
-              <a:defRPr>
-                <a:solidFill>
-                  <a:schemeClr val="tx2"/>
-                </a:solidFill>
-              </a:defRPr>
-            </a:lvl2pPr>
-            <a:lvl3pPr eaLnBrk="1" hangingPunct="1">
-              <a:defRPr>
-                <a:solidFill>
-                  <a:schemeClr val="tx2"/>
-                </a:solidFill>
-              </a:defRPr>
-            </a:lvl3pPr>
-            <a:lvl4pPr eaLnBrk="1" hangingPunct="1">
-              <a:defRPr>
-                <a:solidFill>
-                  <a:schemeClr val="tx2"/>
-                </a:solidFill>
-              </a:defRPr>
-            </a:lvl4pPr>
-            <a:lvl5pPr eaLnBrk="1" hangingPunct="1">
-              <a:defRPr>
-                <a:solidFill>
-                  <a:schemeClr val="tx2"/>
-                </a:solidFill>
-              </a:defRPr>
-            </a:lvl5pPr>
-            <a:lvl6pPr eaLnBrk="1" hangingPunct="1">
-              <a:defRPr>
-                <a:solidFill>
-                  <a:schemeClr val="tx2"/>
-                </a:solidFill>
-              </a:defRPr>
-            </a:lvl6pPr>
-            <a:lvl7pPr eaLnBrk="1" hangingPunct="1">
-              <a:defRPr>
-                <a:solidFill>
-                  <a:schemeClr val="tx2"/>
-                </a:solidFill>
-              </a:defRPr>
-            </a:lvl7pPr>
-            <a:lvl8pPr eaLnBrk="1" hangingPunct="1">
-              <a:defRPr>
-                <a:solidFill>
-                  <a:schemeClr val="tx2"/>
-                </a:solidFill>
-              </a:defRPr>
-            </a:lvl8pPr>
-            <a:lvl9pPr eaLnBrk="1" hangingPunct="1">
-              <a:defRPr>
-                <a:solidFill>
-                  <a:schemeClr val="tx2"/>
-                </a:solidFill>
-              </a:defRPr>
-            </a:lvl9pPr>
-          </a:lstStyle>
-          <a:p>
-            <a:r>
-              <a:rPr lang="fr-FR" dirty="0"/>
-              <a:t>OBJECTIF</a:t>
-            </a:r>
-            <a:endParaRPr lang="en-US" dirty="0"/>
-          </a:p>
-        </p:txBody>
-      </p:sp>
-      <p:sp>
-        <p:nvSpPr>
-          <p:cNvPr id="5" name="Espace réservé du contenu 2">
-            <a:extLst>
-              <a:ext uri="{FF2B5EF4-FFF2-40B4-BE49-F238E27FC236}">
-                <a16:creationId xmlns:a16="http://schemas.microsoft.com/office/drawing/2014/main" id="{4DB361C3-BBE6-4A46-9285-88ACA862555F}"/>
-              </a:ext>
-            </a:extLst>
-          </p:cNvPr>
-          <p:cNvSpPr txBox="1">
-            <a:spLocks/>
-          </p:cNvSpPr>
-          <p:nvPr/>
-        </p:nvSpPr>
-        <p:spPr>
-          <a:xfrm>
-            <a:off x="823384" y="1585139"/>
-            <a:ext cx="3998743" cy="1126519"/>
-          </a:xfrm>
-          <a:prstGeom prst="rect">
-            <a:avLst/>
-          </a:prstGeom>
-        </p:spPr>
-        <p:txBody>
-          <a:bodyPr vert="horz" lIns="91440" tIns="45720" rIns="91440" bIns="45720" rtlCol="0">
-            <a:normAutofit/>
-          </a:bodyPr>
-          <a:lstStyle>
-            <a:lvl1pPr marL="342900" indent="-342900" algn="l" defTabSz="457200" rtl="0" eaLnBrk="1" latinLnBrk="0" hangingPunct="1">
-              <a:spcBef>
-                <a:spcPts val="1000"/>
-              </a:spcBef>
-              <a:spcAft>
-                <a:spcPts val="0"/>
-              </a:spcAft>
-              <a:buClr>
-                <a:schemeClr val="accent1"/>
-              </a:buClr>
-              <a:buSzPct val="80000"/>
-              <a:buFont typeface="Wingdings 3" charset="2"/>
-              <a:buChar char=""/>
-              <a:defRPr sz="1800" kern="1200">
-                <a:solidFill>
-                  <a:schemeClr val="tx1">
-                    <a:lumMod val="75000"/>
-                    <a:lumOff val="25000"/>
-                  </a:schemeClr>
-                </a:solidFill>
-                <a:latin typeface="+mn-lt"/>
-                <a:ea typeface="+mn-ea"/>
-                <a:cs typeface="+mn-cs"/>
-              </a:defRPr>
-            </a:lvl1pPr>
-            <a:lvl2pPr marL="742950" indent="-285750" algn="l" defTabSz="457200" rtl="0" eaLnBrk="1" latinLnBrk="0" hangingPunct="1">
-              <a:spcBef>
-                <a:spcPts val="1000"/>
-              </a:spcBef>
-              <a:spcAft>
-                <a:spcPts val="0"/>
-              </a:spcAft>
-              <a:buClr>
-                <a:schemeClr val="accent1"/>
-              </a:buClr>
-              <a:buSzPct val="80000"/>
-              <a:buFont typeface="Wingdings 3" charset="2"/>
-              <a:buChar char=""/>
-              <a:defRPr sz="1600" kern="1200">
-                <a:solidFill>
-                  <a:schemeClr val="tx1">
-                    <a:lumMod val="75000"/>
-                    <a:lumOff val="25000"/>
-                  </a:schemeClr>
-                </a:solidFill>
-                <a:latin typeface="+mn-lt"/>
-                <a:ea typeface="+mn-ea"/>
-                <a:cs typeface="+mn-cs"/>
-              </a:defRPr>
-            </a:lvl2pPr>
-            <a:lvl3pPr marL="1143000" indent="-228600" algn="l" defTabSz="457200" rtl="0" eaLnBrk="1" latinLnBrk="0" hangingPunct="1">
-              <a:spcBef>
-                <a:spcPts val="1000"/>
-              </a:spcBef>
-              <a:spcAft>
-                <a:spcPts val="0"/>
-              </a:spcAft>
-              <a:buClr>
-                <a:schemeClr val="accent1"/>
-              </a:buClr>
-              <a:buSzPct val="80000"/>
-              <a:buFont typeface="Wingdings 3" charset="2"/>
-              <a:buChar char=""/>
-              <a:defRPr sz="1400" kern="1200">
-                <a:solidFill>
-                  <a:schemeClr val="tx1">
-                    <a:lumMod val="75000"/>
-                    <a:lumOff val="25000"/>
-                  </a:schemeClr>
-                </a:solidFill>
-                <a:latin typeface="+mn-lt"/>
-                <a:ea typeface="+mn-ea"/>
-                <a:cs typeface="+mn-cs"/>
-              </a:defRPr>
-            </a:lvl3pPr>
-            <a:lvl4pPr marL="1600200" indent="-228600" algn="l" defTabSz="457200" rtl="0" eaLnBrk="1" latinLnBrk="0" hangingPunct="1">
-              <a:spcBef>
-                <a:spcPts val="1000"/>
-              </a:spcBef>
-              <a:spcAft>
-                <a:spcPts val="0"/>
-              </a:spcAft>
-              <a:buClr>
-                <a:schemeClr val="accent1"/>
-              </a:buClr>
-              <a:buSzPct val="80000"/>
-              <a:buFont typeface="Wingdings 3" charset="2"/>
-              <a:buChar char=""/>
-              <a:defRPr sz="1200" kern="1200">
-                <a:solidFill>
-                  <a:schemeClr val="tx1">
-                    <a:lumMod val="75000"/>
-                    <a:lumOff val="25000"/>
-                  </a:schemeClr>
-                </a:solidFill>
-                <a:latin typeface="+mn-lt"/>
-                <a:ea typeface="+mn-ea"/>
-                <a:cs typeface="+mn-cs"/>
-              </a:defRPr>
-            </a:lvl4pPr>
-            <a:lvl5pPr marL="2057400" indent="-228600" algn="l" defTabSz="457200" rtl="0" eaLnBrk="1" latinLnBrk="0" hangingPunct="1">
-              <a:spcBef>
-                <a:spcPts val="1000"/>
-              </a:spcBef>
-              <a:spcAft>
-                <a:spcPts val="0"/>
-              </a:spcAft>
-              <a:buClr>
-                <a:schemeClr val="accent1"/>
-              </a:buClr>
-              <a:buSzPct val="80000"/>
-              <a:buFont typeface="Wingdings 3" charset="2"/>
-              <a:buChar char=""/>
-              <a:defRPr sz="1200" kern="1200">
-                <a:solidFill>
-                  <a:schemeClr val="tx1">
-                    <a:lumMod val="75000"/>
-                    <a:lumOff val="25000"/>
-                  </a:schemeClr>
-                </a:solidFill>
-                <a:latin typeface="+mn-lt"/>
-                <a:ea typeface="+mn-ea"/>
-                <a:cs typeface="+mn-cs"/>
-              </a:defRPr>
-            </a:lvl5pPr>
-            <a:lvl6pPr marL="2514600" indent="-228600" algn="l" defTabSz="457200" rtl="0" eaLnBrk="1" latinLnBrk="0" hangingPunct="1">
-              <a:spcBef>
-                <a:spcPts val="1000"/>
-              </a:spcBef>
-              <a:spcAft>
-                <a:spcPts val="0"/>
-              </a:spcAft>
-              <a:buClr>
-                <a:schemeClr val="accent1"/>
-              </a:buClr>
-              <a:buSzPct val="80000"/>
-              <a:buFont typeface="Wingdings 3" charset="2"/>
-              <a:buChar char=""/>
-              <a:defRPr sz="1200" kern="1200">
-                <a:solidFill>
-                  <a:schemeClr val="tx1">
-                    <a:lumMod val="75000"/>
-                    <a:lumOff val="25000"/>
-                  </a:schemeClr>
-                </a:solidFill>
-                <a:latin typeface="+mn-lt"/>
-                <a:ea typeface="+mn-ea"/>
-                <a:cs typeface="+mn-cs"/>
-              </a:defRPr>
-            </a:lvl6pPr>
-            <a:lvl7pPr marL="2971800" indent="-228600" algn="l" defTabSz="457200" rtl="0" eaLnBrk="1" latinLnBrk="0" hangingPunct="1">
-              <a:spcBef>
-                <a:spcPts val="1000"/>
-              </a:spcBef>
-              <a:spcAft>
-                <a:spcPts val="0"/>
-              </a:spcAft>
-              <a:buClr>
-                <a:schemeClr val="accent1"/>
-              </a:buClr>
-              <a:buSzPct val="80000"/>
-              <a:buFont typeface="Wingdings 3" charset="2"/>
-              <a:buChar char=""/>
-              <a:defRPr sz="1200" kern="1200">
-                <a:solidFill>
-                  <a:schemeClr val="tx1">
-                    <a:lumMod val="75000"/>
-                    <a:lumOff val="25000"/>
-                  </a:schemeClr>
-                </a:solidFill>
-                <a:latin typeface="+mn-lt"/>
-                <a:ea typeface="+mn-ea"/>
-                <a:cs typeface="+mn-cs"/>
-              </a:defRPr>
-            </a:lvl7pPr>
-            <a:lvl8pPr marL="3429000" indent="-228600" algn="l" defTabSz="457200" rtl="0" eaLnBrk="1" latinLnBrk="0" hangingPunct="1">
-              <a:spcBef>
-                <a:spcPts val="1000"/>
-              </a:spcBef>
-              <a:spcAft>
-                <a:spcPts val="0"/>
-              </a:spcAft>
-              <a:buClr>
-                <a:schemeClr val="accent1"/>
-              </a:buClr>
-              <a:buSzPct val="80000"/>
-              <a:buFont typeface="Wingdings 3" charset="2"/>
-              <a:buChar char=""/>
-              <a:defRPr sz="1200" kern="1200">
-                <a:solidFill>
-                  <a:schemeClr val="tx1">
-                    <a:lumMod val="75000"/>
-                    <a:lumOff val="25000"/>
-                  </a:schemeClr>
-                </a:solidFill>
-                <a:latin typeface="+mn-lt"/>
-                <a:ea typeface="+mn-ea"/>
-                <a:cs typeface="+mn-cs"/>
-              </a:defRPr>
-            </a:lvl8pPr>
-            <a:lvl9pPr marL="3886200" indent="-228600" algn="l" defTabSz="457200" rtl="0" eaLnBrk="1" latinLnBrk="0" hangingPunct="1">
-              <a:spcBef>
-                <a:spcPts val="1000"/>
-              </a:spcBef>
-              <a:spcAft>
-                <a:spcPts val="0"/>
-              </a:spcAft>
-              <a:buClr>
-                <a:schemeClr val="accent1"/>
-              </a:buClr>
-              <a:buSzPct val="80000"/>
-              <a:buFont typeface="Wingdings 3" charset="2"/>
-              <a:buChar char=""/>
-              <a:defRPr sz="1200" kern="1200">
-                <a:solidFill>
-                  <a:schemeClr val="tx1">
-                    <a:lumMod val="75000"/>
-                    <a:lumOff val="25000"/>
-                  </a:schemeClr>
-                </a:solidFill>
-                <a:latin typeface="+mn-lt"/>
-                <a:ea typeface="+mn-ea"/>
-                <a:cs typeface="+mn-cs"/>
-              </a:defRPr>
-            </a:lvl9pPr>
-          </a:lstStyle>
-          <a:p>
-            <a:pPr marL="0" indent="0" algn="just">
-              <a:buNone/>
-            </a:pPr>
-            <a:r>
-              <a:rPr lang="fr-FR" dirty="0"/>
-              <a:t>Automatiser la détection de tumeurs sur des radiographies de cerveaux humains.</a:t>
-            </a:r>
-          </a:p>
-          <a:p>
-            <a:pPr marL="0" indent="0" algn="just">
-              <a:buNone/>
-            </a:pPr>
-            <a:endParaRPr lang="fr-FR" dirty="0"/>
-          </a:p>
-        </p:txBody>
-      </p:sp>
-      <p:pic>
-        <p:nvPicPr>
-          <p:cNvPr id="11" name="Image 10">
-            <a:extLst>
-              <a:ext uri="{FF2B5EF4-FFF2-40B4-BE49-F238E27FC236}">
-                <a16:creationId xmlns:a16="http://schemas.microsoft.com/office/drawing/2014/main" id="{F27BFDFA-0075-4C49-AA56-ECC86CC31230}"/>
-              </a:ext>
-            </a:extLst>
-          </p:cNvPr>
-          <p:cNvPicPr>
-            <a:picLocks noChangeAspect="1"/>
-          </p:cNvPicPr>
-          <p:nvPr/>
-        </p:nvPicPr>
-        <p:blipFill>
-          <a:blip r:embed="rId2"/>
-          <a:stretch>
-            <a:fillRect/>
-          </a:stretch>
-        </p:blipFill>
-        <p:spPr>
-          <a:xfrm>
-            <a:off x="5121718" y="387653"/>
-            <a:ext cx="6743469" cy="6242779"/>
-          </a:xfrm>
-          <a:prstGeom prst="rect">
-            <a:avLst/>
-          </a:prstGeom>
-        </p:spPr>
-      </p:pic>
-    </p:spTree>
-    <p:extLst>
-      <p:ext uri="{BB962C8B-B14F-4D97-AF65-F5344CB8AC3E}">
-        <p14:creationId xmlns:p14="http://schemas.microsoft.com/office/powerpoint/2010/main" val="1436561955"/>
-      </p:ext>
-    </p:extLst>
-  </p:cSld>
-  <p:clrMapOvr>
-    <a:masterClrMapping/>
-  </p:clrMapOvr>
-</p:sld>
-</file>
-
-<file path=ppt/slides/slide20.xml><?xml version="1.0" encoding="utf-8"?>
+<file path=ppt/slides/slide21.xml><?xml version="1.0" encoding="utf-8"?>
 <p:sld xmlns:a="http://schemas.openxmlformats.org/drawingml/2006/main" xmlns:r="http://schemas.openxmlformats.org/officeDocument/2006/relationships" xmlns:p="http://schemas.openxmlformats.org/presentationml/2006/main">
   <p:cSld>
     <p:spTree>
@@ -41466,7 +41782,7 @@
 </p:sld>
 </file>
 
-<file path=ppt/slides/slide21.xml><?xml version="1.0" encoding="utf-8"?>
+<file path=ppt/slides/slide22.xml><?xml version="1.0" encoding="utf-8"?>
 <p:sld xmlns:a="http://schemas.openxmlformats.org/drawingml/2006/main" xmlns:r="http://schemas.openxmlformats.org/officeDocument/2006/relationships" xmlns:p="http://schemas.openxmlformats.org/presentationml/2006/main">
   <p:cSld>
     <p:spTree>
@@ -41948,13 +42264,13 @@
         </p:nvPicPr>
         <p:blipFill rotWithShape="1">
           <a:blip r:embed="rId3"/>
-          <a:srcRect r="1077"/>
+          <a:srcRect l="1" r="32772"/>
           <a:stretch/>
         </p:blipFill>
         <p:spPr>
           <a:xfrm>
-            <a:off x="1599421" y="1930400"/>
-            <a:ext cx="6566679" cy="2060949"/>
+            <a:off x="1542610" y="1754921"/>
+            <a:ext cx="4444326" cy="2052488"/>
           </a:xfrm>
           <a:prstGeom prst="rect">
             <a:avLst/>
@@ -41975,16 +42291,15 @@
           </p:cNvPicPr>
           <p:nvPr/>
         </p:nvPicPr>
-        <p:blipFill>
+        <p:blipFill rotWithShape="1">
           <a:blip r:embed="rId4"/>
-          <a:stretch>
-            <a:fillRect/>
-          </a:stretch>
+          <a:srcRect r="32433"/>
+          <a:stretch/>
         </p:blipFill>
         <p:spPr>
           <a:xfrm>
-            <a:off x="1604657" y="4135269"/>
-            <a:ext cx="6522229" cy="2141868"/>
+            <a:off x="1580055" y="3881796"/>
+            <a:ext cx="4377897" cy="2127780"/>
           </a:xfrm>
           <a:prstGeom prst="rect">
             <a:avLst/>
@@ -42078,7 +42393,7 @@
 </p:sld>
 </file>
 
-<file path=ppt/slides/slide22.xml><?xml version="1.0" encoding="utf-8"?>
+<file path=ppt/slides/slide23.xml><?xml version="1.0" encoding="utf-8"?>
 <p:sld xmlns:a="http://schemas.openxmlformats.org/drawingml/2006/main" xmlns:r="http://schemas.openxmlformats.org/officeDocument/2006/relationships" xmlns:p="http://schemas.openxmlformats.org/presentationml/2006/main">
   <p:cSld>
     <p:spTree>
@@ -44212,8 +44527,8 @@
         </p:blipFill>
         <p:spPr>
           <a:xfrm>
-            <a:off x="8665961" y="820132"/>
-            <a:ext cx="3345914" cy="2959200"/>
+            <a:off x="8502472" y="901147"/>
+            <a:ext cx="3428917" cy="3032609"/>
           </a:xfrm>
           <a:prstGeom prst="rect">
             <a:avLst/>
@@ -44363,7 +44678,7 @@
 </p:sld>
 </file>
 
-<file path=ppt/slides/slide23.xml><?xml version="1.0" encoding="utf-8"?>
+<file path=ppt/slides/slide24.xml><?xml version="1.0" encoding="utf-8"?>
 <p:sld xmlns:a="http://schemas.openxmlformats.org/drawingml/2006/main" xmlns:r="http://schemas.openxmlformats.org/officeDocument/2006/relationships" xmlns:p="http://schemas.openxmlformats.org/presentationml/2006/main">
   <p:cSld>
     <p:spTree>
@@ -46449,7 +46764,7 @@
 </p:sld>
 </file>
 
-<file path=ppt/slides/slide24.xml><?xml version="1.0" encoding="utf-8"?>
+<file path=ppt/slides/slide25.xml><?xml version="1.0" encoding="utf-8"?>
 <p:sld xmlns:a="http://schemas.openxmlformats.org/drawingml/2006/main" xmlns:r="http://schemas.openxmlformats.org/officeDocument/2006/relationships" xmlns:p="http://schemas.openxmlformats.org/presentationml/2006/main">
   <p:cSld>
     <p:spTree>
@@ -47098,7 +47413,7 @@
 </p:sld>
 </file>
 
-<file path=ppt/slides/slide25.xml><?xml version="1.0" encoding="utf-8"?>
+<file path=ppt/slides/slide26.xml><?xml version="1.0" encoding="utf-8"?>
 <p:sld xmlns:a="http://schemas.openxmlformats.org/drawingml/2006/main" xmlns:r="http://schemas.openxmlformats.org/officeDocument/2006/relationships" xmlns:p="http://schemas.openxmlformats.org/presentationml/2006/main">
   <p:cSld>
     <p:spTree>
@@ -47905,7 +48220,7 @@
 </p:sld>
 </file>
 
-<file path=ppt/slides/slide26.xml><?xml version="1.0" encoding="utf-8"?>
+<file path=ppt/slides/slide27.xml><?xml version="1.0" encoding="utf-8"?>
 <p:sld xmlns:a="http://schemas.openxmlformats.org/drawingml/2006/main" xmlns:r="http://schemas.openxmlformats.org/officeDocument/2006/relationships" xmlns:p="http://schemas.openxmlformats.org/presentationml/2006/main">
   <p:cSld>
     <p:spTree>
@@ -48879,7 +49194,7 @@
 </p:sld>
 </file>
 
-<file path=ppt/slides/slide27.xml><?xml version="1.0" encoding="utf-8"?>
+<file path=ppt/slides/slide28.xml><?xml version="1.0" encoding="utf-8"?>
 <p:sld xmlns:a="http://schemas.openxmlformats.org/drawingml/2006/main" xmlns:r="http://schemas.openxmlformats.org/officeDocument/2006/relationships" xmlns:p="http://schemas.openxmlformats.org/presentationml/2006/main">
   <p:cSld>
     <p:spTree>
@@ -49661,7 +49976,7 @@
 </p:sld>
 </file>
 
-<file path=ppt/slides/slide28.xml><?xml version="1.0" encoding="utf-8"?>
+<file path=ppt/slides/slide29.xml><?xml version="1.0" encoding="utf-8"?>
 <p:sld xmlns:a="http://schemas.openxmlformats.org/drawingml/2006/main" xmlns:r="http://schemas.openxmlformats.org/officeDocument/2006/relationships" xmlns:p="http://schemas.openxmlformats.org/presentationml/2006/main">
   <p:cSld>
     <p:spTree>
@@ -50757,6 +51072,84 @@
           </a:p>
         </p:txBody>
       </p:sp>
+      <p:cxnSp>
+        <p:nvCxnSpPr>
+          <p:cNvPr id="13" name="Connecteur droit avec flèche 12">
+            <a:extLst>
+              <a:ext uri="{FF2B5EF4-FFF2-40B4-BE49-F238E27FC236}">
+                <a16:creationId xmlns:a16="http://schemas.microsoft.com/office/drawing/2014/main" id="{58803A71-C556-422C-A01C-081F75FC8D14}"/>
+              </a:ext>
+            </a:extLst>
+          </p:cNvPr>
+          <p:cNvCxnSpPr>
+            <a:cxnSpLocks/>
+            <a:stCxn id="24" idx="2"/>
+          </p:cNvCxnSpPr>
+          <p:nvPr/>
+        </p:nvCxnSpPr>
+        <p:spPr>
+          <a:xfrm flipH="1">
+            <a:off x="9541744" y="1910331"/>
+            <a:ext cx="155816" cy="1078896"/>
+          </a:xfrm>
+          <a:prstGeom prst="straightConnector1">
+            <a:avLst/>
+          </a:prstGeom>
+          <a:ln>
+            <a:tailEnd type="triangle"/>
+          </a:ln>
+        </p:spPr>
+        <p:style>
+          <a:lnRef idx="1">
+            <a:schemeClr val="accent1"/>
+          </a:lnRef>
+          <a:fillRef idx="0">
+            <a:schemeClr val="accent1"/>
+          </a:fillRef>
+          <a:effectRef idx="0">
+            <a:schemeClr val="accent1"/>
+          </a:effectRef>
+          <a:fontRef idx="minor">
+            <a:schemeClr val="tx1"/>
+          </a:fontRef>
+        </p:style>
+      </p:cxnSp>
+      <p:sp>
+        <p:nvSpPr>
+          <p:cNvPr id="24" name="ZoneTexte 23">
+            <a:extLst>
+              <a:ext uri="{FF2B5EF4-FFF2-40B4-BE49-F238E27FC236}">
+                <a16:creationId xmlns:a16="http://schemas.microsoft.com/office/drawing/2014/main" id="{827C02F2-02F7-4B46-9EFF-C2B14A7BFD5D}"/>
+              </a:ext>
+            </a:extLst>
+          </p:cNvPr>
+          <p:cNvSpPr txBox="1"/>
+          <p:nvPr/>
+        </p:nvSpPr>
+        <p:spPr>
+          <a:xfrm>
+            <a:off x="8459225" y="987001"/>
+            <a:ext cx="2476670" cy="923330"/>
+          </a:xfrm>
+          <a:prstGeom prst="rect">
+            <a:avLst/>
+          </a:prstGeom>
+          <a:noFill/>
+        </p:spPr>
+        <p:txBody>
+          <a:bodyPr wrap="square" rtlCol="0">
+            <a:spAutoFit/>
+          </a:bodyPr>
+          <a:lstStyle/>
+          <a:p>
+            <a:r>
+              <a:rPr lang="fr-FR" dirty="0"/>
+              <a:t>AJOUT de supervisé pour affiner les labels faibles - </a:t>
+            </a:r>
+            <a:endParaRPr lang="en-US" dirty="0"/>
+          </a:p>
+        </p:txBody>
+      </p:sp>
     </p:spTree>
     <p:extLst>
       <p:ext uri="{BB962C8B-B14F-4D97-AF65-F5344CB8AC3E}">
